--- a/curso_es/pptx/S07.pptx
+++ b/curso_es/pptx/S07.pptx
@@ -4806,7 +4806,7 @@
                 </a:solidFill>
                 <a:latin typeface="Nunito Sans"/>
               </a:rPr>
-              <a:t>Leire entra en clase empapada. Aitor le pregunta qué ha pasado. Leire: «Estoy empapada porque me ha pillado la tormenta».</a:t>
+              <a:t>Una chica entra en clase empapada. Un chico le pregunta qué ha pasado. La chica: «Estoy empapada porque me ha pillado la tormenta».</a:t>
             </a:r>
           </a:p>
         </p:txBody>
@@ -4879,7 +4879,7 @@
                 </a:solidFill>
                 <a:latin typeface="Nunito Sans"/>
               </a:rPr>
-              <a:t>Aitor ya ve que está empapada: no hace falta convencerle de eso.</a:t>
+              <a:t>El chico ya ve que está empapada: no hace falta convencerle de eso.</a:t>
             </a:r>
           </a:p>
           <a:p>
@@ -4904,7 +4904,7 @@
                 </a:solidFill>
                 <a:latin typeface="Nunito Sans"/>
               </a:rPr>
-              <a:t>Leire no quiere que acepte nada: le </a:t>
+              <a:t>La chica no quiere que acepte nada: le </a:t>
             </a:r>
             <a:r>
               <a:rPr sz="2400" b="1">
@@ -7596,7 +7596,7 @@
                           </a:solidFill>
                           <a:latin typeface="Nunito Sans"/>
                         </a:rPr>
-                        <a:t>«Naiara paró tres penaltis, así que debería jugar de portera.»</a:t>
+                        <a:t>«Una chica paró tres penaltis, así que debería jugar de portera.»</a:t>
                       </a:r>
                     </a:p>
                   </a:txBody>
